--- a/docs/feishui-guide.pptx
+++ b/docs/feishui-guide.pptx
@@ -143,7 +143,7 @@
   <p:extLst>
     <p:ext uri="{521415D9-36F7-43E2-AB2F-B90AF26B5E84}">
       <p14:sectionLst xmlns:p14="http://schemas.microsoft.com/office/powerpoint/2010/main">
-        <p14:section name="开篇" id="{bd70b5a6-29da-d23d-4291-25221c47841f}">
+        <p14:section name="开篇" id="{a199276b-3eb3-79cc-e20d-23ae38b2c2fc}">
           <p14:sldIdLst>
             <p14:sldId id="256"/>
             <p14:sldId id="257"/>
@@ -154,7 +154,7 @@
             <p14:sldId id="262"/>
           </p14:sldIdLst>
         </p14:section>
-        <p14:section name="战略全局（第一至三节）" id="{8b0452db-e8cc-a974-7488-167c8b0c9841}">
+        <p14:section name="战略全局（第一至三节）" id="{b40934d4-d029-dca2-543e-220a37492e2a}">
           <p14:sldIdLst>
             <p14:sldId id="263"/>
             <p14:sldId id="264"/>
@@ -164,7 +164,7 @@
             <p14:sldId id="268"/>
           </p14:sldIdLst>
         </p14:section>
-        <p14:section name="淝水战场（第四至八节）" id="{5a02a728-c1fd-f33b-c907-298a2eb658bc}">
+        <p14:section name="淝水战场（第四至八节）" id="{2f9758fc-9ecb-bb9a-9f82-57398edd4668}">
           <p14:sldIdLst>
             <p14:sldId id="269"/>
             <p14:sldId id="270"/>
@@ -178,7 +178,7 @@
             <p14:sldId id="278"/>
           </p14:sldIdLst>
         </p14:section>
-        <p14:section name="决战与溃败（第九至十一节）" id="{401f240a-fcc0-1f82-1fa2-45ee0172629b}">
+        <p14:section name="决战与溃败（第九至十一节）" id="{5152f7e5-281a-2d98-d79c-8ce06e07f44c}">
           <p14:sldIdLst>
             <p14:sldId id="279"/>
             <p14:sldId id="280"/>
@@ -188,7 +188,7 @@
             <p14:sldId id="284"/>
           </p14:sldIdLst>
         </p14:section>
-        <p14:section name="战后（第十二、十三节）" id="{3c05d02e-fca4-fb92-0ab3-a2305f5544bc}">
+        <p14:section name="战后（第十二、十三节）" id="{58c26ac4-297e-3027-4172-a36c27a59551}">
           <p14:sldIdLst>
             <p14:sldId id="285"/>
             <p14:sldId id="286"/>
@@ -196,7 +196,7 @@
             <p14:sldId id="288"/>
           </p14:sldIdLst>
         </p14:section>
-        <p14:section name="结语" id="{49ffd5ff-578e-1ad4-990a-0d7072b6aa56}">
+        <p14:section name="结语" id="{b022aa91-7993-ce99-8b26-22a0772f102d}">
           <p14:sldIdLst>
             <p14:sldId id="289"/>
             <p14:sldId id="290"/>
@@ -12260,7 +12260,7 @@
                 <a:ea typeface="Microsoft YaHei" pitchFamily="34" charset="-122"/>
                 <a:cs typeface="Microsoft YaHei" pitchFamily="34" charset="-120"/>
               </a:rPr>
-              <a:t>空格：播放或暂停；← →：上一节、下一节；拖动旋转，滚轮缩放，右键平移。点右上角「自动镜头」回到剧情视角。</a:t>
+              <a:t>空格：播放或暂停；← →：上一节、下一节；拖动平移，右键或 Ctrl 拖动旋转，滚轮缩放。点右上角「自动镜头」回到剧情视角。</a:t>
             </a:r>
             <a:endParaRPr lang="zh-CN" sz="1500" dirty="0"/>
           </a:p>

--- a/docs/feishui-guide.pptx
+++ b/docs/feishui-guide.pptx
@@ -143,7 +143,7 @@
   <p:extLst>
     <p:ext uri="{521415D9-36F7-43E2-AB2F-B90AF26B5E84}">
       <p14:sectionLst xmlns:p14="http://schemas.microsoft.com/office/powerpoint/2010/main">
-        <p14:section name="开篇" id="{a199276b-3eb3-79cc-e20d-23ae38b2c2fc}">
+        <p14:section name="开篇" id="{0186d107-b590-b2b4-6c83-7b74b2d33e77}">
           <p14:sldIdLst>
             <p14:sldId id="256"/>
             <p14:sldId id="257"/>
@@ -154,7 +154,7 @@
             <p14:sldId id="262"/>
           </p14:sldIdLst>
         </p14:section>
-        <p14:section name="战略全局（第一至三节）" id="{b40934d4-d029-dca2-543e-220a37492e2a}">
+        <p14:section name="战略全局（第一至三节）" id="{39d35c00-c5eb-d84b-d37a-6a51a57bc4f3}">
           <p14:sldIdLst>
             <p14:sldId id="263"/>
             <p14:sldId id="264"/>
@@ -164,7 +164,7 @@
             <p14:sldId id="268"/>
           </p14:sldIdLst>
         </p14:section>
-        <p14:section name="淝水战场（第四至八节）" id="{2f9758fc-9ecb-bb9a-9f82-57398edd4668}">
+        <p14:section name="淝水战场（第四至八节）" id="{cca17f03-514a-7b5c-8c61-14ce6d8de023}">
           <p14:sldIdLst>
             <p14:sldId id="269"/>
             <p14:sldId id="270"/>
@@ -178,7 +178,7 @@
             <p14:sldId id="278"/>
           </p14:sldIdLst>
         </p14:section>
-        <p14:section name="决战与溃败（第九至十一节）" id="{5152f7e5-281a-2d98-d79c-8ce06e07f44c}">
+        <p14:section name="决战与溃败（第九至十一节）" id="{3d021651-3c9d-a766-4ee8-24e3608f0f4f}">
           <p14:sldIdLst>
             <p14:sldId id="279"/>
             <p14:sldId id="280"/>
@@ -188,7 +188,7 @@
             <p14:sldId id="284"/>
           </p14:sldIdLst>
         </p14:section>
-        <p14:section name="战后（第十二、十三节）" id="{58c26ac4-297e-3027-4172-a36c27a59551}">
+        <p14:section name="战后（第十二、十三节）" id="{528aec03-472c-1d9f-f66e-eab6d562ac8f}">
           <p14:sldIdLst>
             <p14:sldId id="285"/>
             <p14:sldId id="286"/>
@@ -196,7 +196,7 @@
             <p14:sldId id="288"/>
           </p14:sldIdLst>
         </p14:section>
-        <p14:section name="结语" id="{b022aa91-7993-ce99-8b26-22a0772f102d}">
+        <p14:section name="结语" id="{9f3a92ef-e375-b8be-e177-8148b4d17041}">
           <p14:sldIdLst>
             <p14:sldId id="289"/>
             <p14:sldId id="290"/>
@@ -11834,11 +11834,11 @@
         <p:spPr>
           <a:xfrm>
             <a:off x="812902" y="1737360"/>
-            <a:ext cx="3339084" cy="3154680"/>
+            <a:ext cx="3339084" cy="3474720"/>
           </a:xfrm>
           <a:prstGeom prst="roundRect">
             <a:avLst>
-              <a:gd name="adj" fmla="val 2319"/>
+              <a:gd name="adj" fmla="val 2191"/>
             </a:avLst>
           </a:prstGeom>
           <a:solidFill>
@@ -11939,7 +11939,7 @@
         <p:spPr>
           <a:xfrm>
             <a:off x="1087222" y="3108960"/>
-            <a:ext cx="2790444" cy="2286000"/>
+            <a:ext cx="2790444" cy="2011680"/>
           </a:xfrm>
           <a:prstGeom prst="rect">
             <a:avLst/>
@@ -11981,11 +11981,11 @@
         <p:spPr>
           <a:xfrm>
             <a:off x="4426306" y="1737360"/>
-            <a:ext cx="3339084" cy="3154680"/>
+            <a:ext cx="3339084" cy="3474720"/>
           </a:xfrm>
           <a:prstGeom prst="roundRect">
             <a:avLst>
-              <a:gd name="adj" fmla="val 2319"/>
+              <a:gd name="adj" fmla="val 2191"/>
             </a:avLst>
           </a:prstGeom>
           <a:solidFill>
@@ -12086,7 +12086,7 @@
         <p:spPr>
           <a:xfrm>
             <a:off x="4700626" y="3108960"/>
-            <a:ext cx="2790444" cy="2286000"/>
+            <a:ext cx="2790444" cy="2011680"/>
           </a:xfrm>
           <a:prstGeom prst="rect">
             <a:avLst/>
@@ -12128,11 +12128,11 @@
         <p:spPr>
           <a:xfrm>
             <a:off x="8039710" y="1737360"/>
-            <a:ext cx="3339084" cy="3154680"/>
+            <a:ext cx="3339084" cy="3474720"/>
           </a:xfrm>
           <a:prstGeom prst="roundRect">
             <a:avLst>
-              <a:gd name="adj" fmla="val 2319"/>
+              <a:gd name="adj" fmla="val 2191"/>
             </a:avLst>
           </a:prstGeom>
           <a:solidFill>
@@ -12233,7 +12233,7 @@
         <p:spPr>
           <a:xfrm>
             <a:off x="8314030" y="3108960"/>
-            <a:ext cx="2790444" cy="2286000"/>
+            <a:ext cx="2790444" cy="2011680"/>
           </a:xfrm>
           <a:prstGeom prst="rect">
             <a:avLst/>
@@ -12260,7 +12260,7 @@
                 <a:ea typeface="Microsoft YaHei" pitchFamily="34" charset="-122"/>
                 <a:cs typeface="Microsoft YaHei" pitchFamily="34" charset="-120"/>
               </a:rPr>
-              <a:t>空格：播放或暂停；← →：上一节、下一节；拖动平移，右键或 Ctrl 拖动旋转，滚轮缩放。点右上角「自动镜头」回到剧情视角。</a:t>
+              <a:t>空格：播放或暂停；← →：上一节、下一节；拖动平移，右键或 Ctrl 拖动旋转，滚轮缩放；指北针旁的按钮可转向、翻转。点右上角「自动镜头」回到剧情视角。</a:t>
             </a:r>
             <a:endParaRPr lang="zh-CN" sz="1500" dirty="0"/>
           </a:p>
